--- a/Figures/Geospatial Dataset Workflow.pptx
+++ b/Figures/Geospatial Dataset Workflow.pptx
@@ -1,6 +1,6 @@
 
 <file path=ppt/presentation.xml><?xml version="1.0" encoding="utf-8"?>
-<p:presentation xmlns:a="http://schemas.openxmlformats.org/drawingml/2006/main" xmlns:r="http://schemas.openxmlformats.org/officeDocument/2006/relationships" xmlns:p="http://schemas.openxmlformats.org/presentationml/2006/main" saveSubsetFonts="1">
+<p:presentation xmlns:a="http://schemas.openxmlformats.org/drawingml/2006/main" xmlns:r="http://schemas.openxmlformats.org/officeDocument/2006/relationships" xmlns:p="http://schemas.openxmlformats.org/presentationml/2006/main" saveSubsetFonts="1" autoCompressPictures="0">
   <p:sldMasterIdLst>
     <p:sldMasterId id="2147483672" r:id="rId1"/>
   </p:sldMasterIdLst>
@@ -243,7 +243,7 @@
           <a:p>
             <a:fld id="{F05E1E09-E68C-460C-9525-CF34F9491C17}" type="datetimeFigureOut">
               <a:rPr lang="en-AU" smtClean="0"/>
-              <a:t>21/04/2026</a:t>
+              <a:t>22/04/2026</a:t>
             </a:fld>
             <a:endParaRPr lang="en-AU"/>
           </a:p>
@@ -413,7 +413,7 @@
           <a:p>
             <a:fld id="{F05E1E09-E68C-460C-9525-CF34F9491C17}" type="datetimeFigureOut">
               <a:rPr lang="en-AU" smtClean="0"/>
-              <a:t>21/04/2026</a:t>
+              <a:t>22/04/2026</a:t>
             </a:fld>
             <a:endParaRPr lang="en-AU"/>
           </a:p>
@@ -593,7 +593,7 @@
           <a:p>
             <a:fld id="{F05E1E09-E68C-460C-9525-CF34F9491C17}" type="datetimeFigureOut">
               <a:rPr lang="en-AU" smtClean="0"/>
-              <a:t>21/04/2026</a:t>
+              <a:t>22/04/2026</a:t>
             </a:fld>
             <a:endParaRPr lang="en-AU"/>
           </a:p>
@@ -763,7 +763,7 @@
           <a:p>
             <a:fld id="{F05E1E09-E68C-460C-9525-CF34F9491C17}" type="datetimeFigureOut">
               <a:rPr lang="en-AU" smtClean="0"/>
-              <a:t>21/04/2026</a:t>
+              <a:t>22/04/2026</a:t>
             </a:fld>
             <a:endParaRPr lang="en-AU"/>
           </a:p>
@@ -1009,7 +1009,7 @@
           <a:p>
             <a:fld id="{F05E1E09-E68C-460C-9525-CF34F9491C17}" type="datetimeFigureOut">
               <a:rPr lang="en-AU" smtClean="0"/>
-              <a:t>21/04/2026</a:t>
+              <a:t>22/04/2026</a:t>
             </a:fld>
             <a:endParaRPr lang="en-AU"/>
           </a:p>
@@ -1241,7 +1241,7 @@
           <a:p>
             <a:fld id="{F05E1E09-E68C-460C-9525-CF34F9491C17}" type="datetimeFigureOut">
               <a:rPr lang="en-AU" smtClean="0"/>
-              <a:t>21/04/2026</a:t>
+              <a:t>22/04/2026</a:t>
             </a:fld>
             <a:endParaRPr lang="en-AU"/>
           </a:p>
@@ -1608,7 +1608,7 @@
           <a:p>
             <a:fld id="{F05E1E09-E68C-460C-9525-CF34F9491C17}" type="datetimeFigureOut">
               <a:rPr lang="en-AU" smtClean="0"/>
-              <a:t>21/04/2026</a:t>
+              <a:t>22/04/2026</a:t>
             </a:fld>
             <a:endParaRPr lang="en-AU"/>
           </a:p>
@@ -1726,7 +1726,7 @@
           <a:p>
             <a:fld id="{F05E1E09-E68C-460C-9525-CF34F9491C17}" type="datetimeFigureOut">
               <a:rPr lang="en-AU" smtClean="0"/>
-              <a:t>21/04/2026</a:t>
+              <a:t>22/04/2026</a:t>
             </a:fld>
             <a:endParaRPr lang="en-AU"/>
           </a:p>
@@ -1821,7 +1821,7 @@
           <a:p>
             <a:fld id="{F05E1E09-E68C-460C-9525-CF34F9491C17}" type="datetimeFigureOut">
               <a:rPr lang="en-AU" smtClean="0"/>
-              <a:t>21/04/2026</a:t>
+              <a:t>22/04/2026</a:t>
             </a:fld>
             <a:endParaRPr lang="en-AU"/>
           </a:p>
@@ -2098,7 +2098,7 @@
           <a:p>
             <a:fld id="{F05E1E09-E68C-460C-9525-CF34F9491C17}" type="datetimeFigureOut">
               <a:rPr lang="en-AU" smtClean="0"/>
-              <a:t>21/04/2026</a:t>
+              <a:t>22/04/2026</a:t>
             </a:fld>
             <a:endParaRPr lang="en-AU"/>
           </a:p>
@@ -2355,7 +2355,7 @@
           <a:p>
             <a:fld id="{F05E1E09-E68C-460C-9525-CF34F9491C17}" type="datetimeFigureOut">
               <a:rPr lang="en-AU" smtClean="0"/>
-              <a:t>21/04/2026</a:t>
+              <a:t>22/04/2026</a:t>
             </a:fld>
             <a:endParaRPr lang="en-AU"/>
           </a:p>
@@ -2568,7 +2568,7 @@
           <a:p>
             <a:fld id="{F05E1E09-E68C-460C-9525-CF34F9491C17}" type="datetimeFigureOut">
               <a:rPr lang="en-AU" smtClean="0"/>
-              <a:t>21/04/2026</a:t>
+              <a:t>22/04/2026</a:t>
             </a:fld>
             <a:endParaRPr lang="en-AU"/>
           </a:p>
@@ -2987,7 +2987,7 @@
         </p:nvSpPr>
         <p:spPr>
           <a:xfrm>
-            <a:off x="70338" y="471838"/>
+            <a:off x="39078" y="432029"/>
             <a:ext cx="817520" cy="778599"/>
           </a:xfrm>
           <a:prstGeom prst="rect">
@@ -3012,7 +3012,7 @@
           </a:fontRef>
         </p:style>
         <p:txBody>
-          <a:bodyPr rtlCol="0" anchor="ctr"/>
+          <a:bodyPr lIns="54000" tIns="36000" rIns="54000" bIns="36000" rtlCol="0" anchor="ctr"/>
           <a:lstStyle/>
           <a:p>
             <a:pPr algn="ctr"/>
@@ -3059,7 +3059,7 @@
         </p:nvCxnSpPr>
         <p:spPr>
           <a:xfrm>
-            <a:off x="891512" y="861062"/>
+            <a:off x="866744" y="821253"/>
             <a:ext cx="194150" cy="150"/>
           </a:xfrm>
           <a:prstGeom prst="straightConnector1">
@@ -3101,8 +3101,8 @@
         </p:nvSpPr>
         <p:spPr>
           <a:xfrm>
-            <a:off x="1089316" y="127806"/>
-            <a:ext cx="1002562" cy="1466663"/>
+            <a:off x="1048340" y="144215"/>
+            <a:ext cx="1002562" cy="1354226"/>
           </a:xfrm>
           <a:prstGeom prst="rect">
             <a:avLst/>
@@ -3126,7 +3126,7 @@
           </a:fontRef>
         </p:style>
         <p:txBody>
-          <a:bodyPr rtlCol="0" anchor="ctr"/>
+          <a:bodyPr lIns="54000" tIns="36000" rIns="54000" bIns="36000" rtlCol="0" anchor="ctr"/>
           <a:lstStyle/>
           <a:p>
             <a:pPr algn="ctr"/>
@@ -3157,7 +3157,7 @@
         </p:nvCxnSpPr>
         <p:spPr>
           <a:xfrm>
-            <a:off x="2095532" y="861062"/>
+            <a:off x="2056040" y="821253"/>
             <a:ext cx="194150" cy="150"/>
           </a:xfrm>
           <a:prstGeom prst="straightConnector1">
@@ -3199,8 +3199,8 @@
         </p:nvSpPr>
         <p:spPr>
           <a:xfrm>
-            <a:off x="2293336" y="127806"/>
-            <a:ext cx="1002562" cy="1466663"/>
+            <a:off x="2242644" y="144215"/>
+            <a:ext cx="1002562" cy="1354226"/>
           </a:xfrm>
           <a:prstGeom prst="rect">
             <a:avLst/>
@@ -3224,7 +3224,7 @@
           </a:fontRef>
         </p:style>
         <p:txBody>
-          <a:bodyPr rtlCol="0" anchor="ctr"/>
+          <a:bodyPr lIns="54000" tIns="36000" rIns="54000" bIns="36000" rtlCol="0" anchor="ctr"/>
           <a:lstStyle/>
           <a:p>
             <a:pPr algn="ctr"/>
@@ -3287,7 +3287,7 @@
         </p:nvCxnSpPr>
         <p:spPr>
           <a:xfrm>
-            <a:off x="3299552" y="861062"/>
+            <a:off x="3254572" y="821253"/>
             <a:ext cx="194150" cy="151"/>
           </a:xfrm>
           <a:prstGeom prst="straightConnector1">
@@ -3329,8 +3329,8 @@
         </p:nvSpPr>
         <p:spPr>
           <a:xfrm>
-            <a:off x="3497356" y="59981"/>
-            <a:ext cx="1054901" cy="1602313"/>
+            <a:off x="3436948" y="110228"/>
+            <a:ext cx="1054901" cy="1422200"/>
           </a:xfrm>
           <a:prstGeom prst="rect">
             <a:avLst/>
@@ -3354,7 +3354,7 @@
           </a:fontRef>
         </p:style>
         <p:txBody>
-          <a:bodyPr rtlCol="0" anchor="ctr"/>
+          <a:bodyPr lIns="54000" tIns="36000" rIns="54000" bIns="36000" rtlCol="0" anchor="ctr"/>
           <a:lstStyle/>
           <a:p>
             <a:pPr algn="ctr"/>
@@ -3401,7 +3401,7 @@
         </p:nvCxnSpPr>
         <p:spPr>
           <a:xfrm>
-            <a:off x="4555911" y="861062"/>
+            <a:off x="4496207" y="821253"/>
             <a:ext cx="194150" cy="151"/>
           </a:xfrm>
           <a:prstGeom prst="straightConnector1">
@@ -3443,8 +3443,8 @@
         </p:nvSpPr>
         <p:spPr>
           <a:xfrm>
-            <a:off x="4753715" y="103061"/>
-            <a:ext cx="1054901" cy="1516152"/>
+            <a:off x="4683591" y="141346"/>
+            <a:ext cx="948672" cy="1359965"/>
           </a:xfrm>
           <a:prstGeom prst="rect">
             <a:avLst/>
@@ -3468,7 +3468,7 @@
           </a:fontRef>
         </p:style>
         <p:txBody>
-          <a:bodyPr rtlCol="0" anchor="ctr"/>
+          <a:bodyPr lIns="54000" tIns="36000" rIns="54000" bIns="36000" rtlCol="0" anchor="ctr"/>
           <a:lstStyle/>
           <a:p>
             <a:pPr algn="ctr"/>
@@ -3478,15 +3478,7 @@
                   <a:schemeClr val="tx1"/>
                 </a:solidFill>
               </a:rPr>
-              <a:t>5. Build </a:t>
-            </a:r>
-            <a:r>
-              <a:rPr lang="en-AU" sz="1300" i="1" u="sng" dirty="0">
-                <a:solidFill>
-                  <a:schemeClr val="tx1"/>
-                </a:solidFill>
-              </a:rPr>
-              <a:t>Master</a:t>
+              <a:t>5. Build Master</a:t>
             </a:r>
             <a:r>
               <a:rPr lang="en-AU" sz="1300" u="sng" dirty="0">
@@ -3523,7 +3515,7 @@
         </p:nvCxnSpPr>
         <p:spPr>
           <a:xfrm>
-            <a:off x="5812270" y="861061"/>
+            <a:off x="5640849" y="821252"/>
             <a:ext cx="194150" cy="153"/>
           </a:xfrm>
           <a:prstGeom prst="straightConnector1">
@@ -3565,8 +3557,8 @@
         </p:nvSpPr>
         <p:spPr>
           <a:xfrm>
-            <a:off x="6010074" y="23445"/>
-            <a:ext cx="1054901" cy="1675384"/>
+            <a:off x="5824005" y="23522"/>
+            <a:ext cx="1054901" cy="1595613"/>
           </a:xfrm>
           <a:prstGeom prst="rect">
             <a:avLst/>
@@ -3590,7 +3582,7 @@
           </a:fontRef>
         </p:style>
         <p:txBody>
-          <a:bodyPr rtlCol="0" anchor="ctr"/>
+          <a:bodyPr lIns="54000" tIns="36000" rIns="54000" bIns="36000" rtlCol="0" anchor="ctr"/>
           <a:lstStyle/>
           <a:p>
             <a:pPr algn="ctr"/>
@@ -3600,23 +3592,7 @@
                   <a:schemeClr val="tx1"/>
                 </a:solidFill>
               </a:rPr>
-              <a:t>6. Clip Master polygon to the latest coastline to obtain the </a:t>
-            </a:r>
-            <a:r>
-              <a:rPr lang="en-AU" sz="1300" i="1" u="sng" dirty="0">
-                <a:solidFill>
-                  <a:schemeClr val="tx1"/>
-                </a:solidFill>
-              </a:rPr>
-              <a:t>Clipped</a:t>
-            </a:r>
-            <a:r>
-              <a:rPr lang="en-AU" sz="1300" dirty="0">
-                <a:solidFill>
-                  <a:schemeClr val="tx1"/>
-                </a:solidFill>
-              </a:rPr>
-              <a:t> polygon.</a:t>
+              <a:t>6. Clip Master polygon to the latest coastline to obtain the Clipped polygon.</a:t>
             </a:r>
           </a:p>
         </p:txBody>
@@ -3632,13 +3608,15 @@
           </p:cNvPr>
           <p:cNvCxnSpPr>
             <a:cxnSpLocks/>
+            <a:stCxn id="23" idx="3"/>
+            <a:endCxn id="22" idx="1"/>
           </p:cNvCxnSpPr>
           <p:nvPr/>
         </p:nvCxnSpPr>
         <p:spPr>
-          <a:xfrm>
-            <a:off x="7068629" y="861137"/>
-            <a:ext cx="194150" cy="0"/>
+          <a:xfrm flipV="1">
+            <a:off x="6878906" y="821328"/>
+            <a:ext cx="191742" cy="1"/>
           </a:xfrm>
           <a:prstGeom prst="straightConnector1">
             <a:avLst/>
@@ -3679,8 +3657,8 @@
         </p:nvSpPr>
         <p:spPr>
           <a:xfrm>
-            <a:off x="9779151" y="383877"/>
-            <a:ext cx="1054901" cy="954521"/>
+            <a:off x="9977863" y="518364"/>
+            <a:ext cx="933569" cy="605929"/>
           </a:xfrm>
           <a:prstGeom prst="rect">
             <a:avLst/>
@@ -3704,7 +3682,7 @@
           </a:fontRef>
         </p:style>
         <p:txBody>
-          <a:bodyPr rtlCol="0" anchor="ctr"/>
+          <a:bodyPr lIns="54000" tIns="36000" rIns="54000" bIns="36000" rtlCol="0" anchor="ctr"/>
           <a:lstStyle/>
           <a:p>
             <a:pPr algn="ctr"/>
@@ -3714,7 +3692,7 @@
                   <a:schemeClr val="tx1"/>
                 </a:solidFill>
               </a:rPr>
-              <a:t>9. Optional: add extra metadata.</a:t>
+              <a:t>9. Add extra metadata.</a:t>
             </a:r>
           </a:p>
         </p:txBody>
@@ -3735,7 +3713,7 @@
         </p:nvCxnSpPr>
         <p:spPr>
           <a:xfrm>
-            <a:off x="10837706" y="861061"/>
+            <a:off x="10898882" y="821252"/>
             <a:ext cx="194147" cy="152"/>
           </a:xfrm>
           <a:prstGeom prst="straightConnector1">
@@ -3777,8 +3755,8 @@
         </p:nvSpPr>
         <p:spPr>
           <a:xfrm>
-            <a:off x="8522792" y="59828"/>
-            <a:ext cx="1054901" cy="1602618"/>
+            <a:off x="8621330" y="41637"/>
+            <a:ext cx="1164791" cy="1559383"/>
           </a:xfrm>
           <a:prstGeom prst="rect">
             <a:avLst/>
@@ -3802,7 +3780,7 @@
           </a:fontRef>
         </p:style>
         <p:txBody>
-          <a:bodyPr rtlCol="0" anchor="ctr"/>
+          <a:bodyPr lIns="54000" tIns="36000" rIns="54000" bIns="36000" rtlCol="0" anchor="ctr"/>
           <a:lstStyle/>
           <a:p>
             <a:pPr algn="ctr"/>
@@ -3828,7 +3806,23 @@
                   <a:schemeClr val="tx1"/>
                 </a:solidFill>
               </a:rPr>
-              <a:t> and export (e.g., </a:t>
+              <a:t> and export (</a:t>
+            </a:r>
+            <a:r>
+              <a:rPr lang="en-AU" sz="1300" i="1" dirty="0">
+                <a:solidFill>
+                  <a:schemeClr val="tx1"/>
+                </a:solidFill>
+              </a:rPr>
+              <a:t>e.g.</a:t>
+            </a:r>
+            <a:r>
+              <a:rPr lang="en-AU" sz="1300" dirty="0">
+                <a:solidFill>
+                  <a:schemeClr val="tx1"/>
+                </a:solidFill>
+              </a:rPr>
+              <a:t>, </a:t>
             </a:r>
             <a:r>
               <a:rPr lang="en-AU" sz="1300" dirty="0" err="1">
@@ -3837,6 +3831,14 @@
                 </a:solidFill>
               </a:rPr>
               <a:t>CCAMLR_ASD.gpkg</a:t>
+            </a:r>
+            <a:r>
+              <a:rPr lang="en-AU" sz="1300" dirty="0">
+                <a:solidFill>
+                  <a:schemeClr val="tx1"/>
+                </a:solidFill>
+              </a:rPr>
+              <a:t>).</a:t>
             </a:r>
             <a:endParaRPr lang="en-AU" sz="1300" i="1" dirty="0">
               <a:solidFill>
@@ -3862,7 +3864,7 @@
         </p:nvCxnSpPr>
         <p:spPr>
           <a:xfrm>
-            <a:off x="9581347" y="861137"/>
+            <a:off x="9778579" y="821328"/>
             <a:ext cx="194150" cy="0"/>
           </a:xfrm>
           <a:prstGeom prst="straightConnector1">
@@ -3904,8 +3906,8 @@
         </p:nvSpPr>
         <p:spPr>
           <a:xfrm>
-            <a:off x="11035503" y="23445"/>
-            <a:ext cx="1054901" cy="1675384"/>
+            <a:off x="11103178" y="91810"/>
+            <a:ext cx="1057562" cy="1459036"/>
           </a:xfrm>
           <a:prstGeom prst="rect">
             <a:avLst/>
@@ -3929,7 +3931,7 @@
           </a:fontRef>
         </p:style>
         <p:txBody>
-          <a:bodyPr rtlCol="0" anchor="ctr"/>
+          <a:bodyPr lIns="54000" tIns="36000" rIns="54000" bIns="36000" rtlCol="0" anchor="ctr"/>
           <a:lstStyle/>
           <a:p>
             <a:pPr algn="ctr"/>
@@ -3939,7 +3941,7 @@
                   <a:schemeClr val="tx1"/>
                 </a:solidFill>
               </a:rPr>
-              <a:t>10. Optional: group all classes into a single </a:t>
+              <a:t>10. Group all classes into a single </a:t>
             </a:r>
             <a:r>
               <a:rPr lang="en-AU" sz="1300" dirty="0" err="1">
@@ -3971,7 +3973,7 @@
                   <a:schemeClr val="tx1"/>
                 </a:solidFill>
               </a:rPr>
-              <a:t>)</a:t>
+              <a:t>).</a:t>
             </a:r>
           </a:p>
         </p:txBody>
@@ -3990,8 +3992,8 @@
         </p:nvSpPr>
         <p:spPr>
           <a:xfrm>
-            <a:off x="7266433" y="239490"/>
-            <a:ext cx="1054901" cy="1243295"/>
+            <a:off x="7070648" y="315855"/>
+            <a:ext cx="1358940" cy="1010946"/>
           </a:xfrm>
           <a:prstGeom prst="rect">
             <a:avLst/>
@@ -4015,7 +4017,7 @@
           </a:fontRef>
         </p:style>
         <p:txBody>
-          <a:bodyPr rtlCol="0" anchor="ctr"/>
+          <a:bodyPr lIns="54000" tIns="36000" rIns="54000" bIns="36000" rtlCol="0" anchor="ctr"/>
           <a:lstStyle/>
           <a:p>
             <a:pPr algn="ctr"/>
@@ -4025,7 +4027,23 @@
                   <a:schemeClr val="tx1"/>
                 </a:solidFill>
               </a:rPr>
-              <a:t>7. Export single object (e.g., ASD_481_Master.gpkg</a:t>
+              <a:t>7. Export single object (</a:t>
+            </a:r>
+            <a:r>
+              <a:rPr lang="en-AU" sz="1300" i="1" dirty="0">
+                <a:solidFill>
+                  <a:schemeClr val="tx1"/>
+                </a:solidFill>
+              </a:rPr>
+              <a:t>e.g.</a:t>
+            </a:r>
+            <a:r>
+              <a:rPr lang="en-AU" sz="1300" dirty="0">
+                <a:solidFill>
+                  <a:schemeClr val="tx1"/>
+                </a:solidFill>
+              </a:rPr>
+              <a:t>, ASD_481_Master.gpkg).</a:t>
             </a:r>
             <a:endParaRPr lang="en-AU" sz="1300" i="1" dirty="0">
               <a:solidFill>
@@ -4051,7 +4069,7 @@
         </p:nvCxnSpPr>
         <p:spPr>
           <a:xfrm>
-            <a:off x="8324988" y="861137"/>
+            <a:off x="8427054" y="821328"/>
             <a:ext cx="194150" cy="0"/>
           </a:xfrm>
           <a:prstGeom prst="straightConnector1">
@@ -4095,7 +4113,7 @@
         </p:nvCxnSpPr>
         <p:spPr>
           <a:xfrm>
-            <a:off x="70338" y="1739349"/>
+            <a:off x="39078" y="1702405"/>
             <a:ext cx="4481921" cy="0"/>
           </a:xfrm>
           <a:prstGeom prst="straightConnector1">
@@ -4137,8 +4155,8 @@
         </p:nvCxnSpPr>
         <p:spPr>
           <a:xfrm>
-            <a:off x="4750061" y="1739349"/>
-            <a:ext cx="3571273" cy="0"/>
+            <a:off x="4683591" y="1702405"/>
+            <a:ext cx="3800966" cy="0"/>
           </a:xfrm>
           <a:prstGeom prst="straightConnector1">
             <a:avLst/>
@@ -4179,8 +4197,8 @@
         </p:nvCxnSpPr>
         <p:spPr>
           <a:xfrm>
-            <a:off x="8519131" y="1739349"/>
-            <a:ext cx="3571273" cy="0"/>
+            <a:off x="8621204" y="1698660"/>
+            <a:ext cx="3539536" cy="3745"/>
           </a:xfrm>
           <a:prstGeom prst="straightConnector1">
             <a:avLst/>
@@ -4219,7 +4237,7 @@
         </p:nvSpPr>
         <p:spPr>
           <a:xfrm>
-            <a:off x="1347241" y="1710130"/>
+            <a:off x="1315981" y="1700894"/>
             <a:ext cx="1928113" cy="307777"/>
           </a:xfrm>
           <a:prstGeom prst="rect">
@@ -4284,7 +4302,7 @@
         </p:nvSpPr>
         <p:spPr>
           <a:xfrm>
-            <a:off x="5518076" y="1707896"/>
+            <a:off x="5486816" y="1698660"/>
             <a:ext cx="2035242" cy="307777"/>
           </a:xfrm>
           <a:prstGeom prst="rect">
@@ -4349,7 +4367,7 @@
         </p:nvSpPr>
         <p:spPr>
           <a:xfrm>
-            <a:off x="9410310" y="1707896"/>
+            <a:off x="9379050" y="1698660"/>
             <a:ext cx="2193649" cy="307777"/>
           </a:xfrm>
           <a:prstGeom prst="rect">
